--- a/docs/Review_1_Presentation.pptx
+++ b/docs/Review_1_Presentation.pptx
@@ -2611,7 +2611,7 @@
           <a:lstStyle/>
           <a:p>
             <a:r>
-              <a:t>The screenshot is the executed notebook cell, re-running the cleaning on the raw files and matching the script output exactly. Most removals are very short reviews ('ok', a single emoji). The language check looks at letters only, so English reviews with emojis stay; the non-English removals are mostly Hindi (Devanagari), then Bengali and Telugu. An earlier version of the rule counted emojis as non-English and wrongly removed about 76,000 English reviews; we found and fixed it. No duplicates were found.</a:t>
+              <a:t>The screenshot is the executed notebook cell, running the cleaning on the raw files and matching the script output exactly. Most removals are very short reviews ('ok', a single emoji). The language check looks at letters only, so English reviews with emojis stay; the non-English removals are mostly Hindi (Devanagari), then Bengali and Telugu. An earlier version of the rule counted emojis as non-English and wrongly removed about 76,000 English reviews; we found and fixed it. No duplicates were found.</a:t>
             </a:r>
           </a:p>
         </p:txBody>
@@ -2842,7 +2842,7 @@
           <a:lstStyle/>
           <a:p>
             <a:r>
-              <a:t>Because problem reviews are now the minority (19.5%), both models use balanced class weights. The Random Forest is size-limited so the saved model fits in the repository. The out-of-time split checks that the model works on future weeks.</a:t>
+              <a:t>Because problem reviews are the minority (19.5%), both models use balanced class weights. The Random Forest is size-limited so the saved model fits in the repository. The out-of-time split checks that the model works on future weeks.</a:t>
             </a:r>
           </a:p>
         </p:txBody>
@@ -2919,7 +2919,7 @@
           <a:lstStyle/>
           <a:p>
             <a:r>
-              <a:t>Lead with PR-AUC: 0.87 against 0.195 for random. The confusion matrix shows the Random Forest misses 5,756 of 44,316 complaints and raises 13,743 false alarms out of 183,282 non-problem reviews. Logistic Regression raises 11,538 false alarms but misses 6,297 complaints. Per-app results are in MODEL_EVALUATION.md.</a:t>
+              <a:t>Lead with PR-AUC: 0.87 against 0.195 for random. The confusion matrix shows the Random Forest misses 5,756 of 44,316 complaints and raises 13,743 false alarms out of 183,282 non-problem reviews. Logistic Regression raises 11,538 false alarms but misses 6,297 complaints. The differences between the models are small but real: the 95% bootstrap interval for the PR-AUC difference (Random Forest minus Logistic Regression) is 0.001 to 0.004. Per-app results are in MODEL_EVALUATION.md.</a:t>
             </a:r>
           </a:p>
         </p:txBody>
@@ -2996,7 +2996,7 @@
           <a:lstStyle/>
           <a:p>
             <a:r>
-              <a:t>Every task has one or two assignees and a due date on the GitHub Projects board, and every task is covered by a merged pull request. The activity history shows when each stage was merged.</a:t>
+              <a:t>Every task has one or two assignees and a due date on the GitHub Projects board, and every task is covered by a merged pull request. The screenshot is the board's table view: all 15 tasks with their assignees, status, linked pull request and due date.</a:t>
             </a:r>
           </a:p>
         </p:txBody>
@@ -3508,8 +3508,8 @@
         </p:nvSpPr>
         <p:spPr>
           <a:xfrm>
-            <a:off x="722376" y="1600200"/>
-            <a:ext cx="5669280" cy="2194560"/>
+            <a:off x="722376" y="1764792"/>
+            <a:ext cx="10707624" cy="2194560"/>
           </a:xfrm>
           <a:prstGeom prst="rect">
             <a:avLst/>
@@ -3524,13 +3524,13 @@
           <a:p>
             <a:pPr algn="l">
               <a:spcAft>
-                <a:spcPts val="800"/>
+                <a:spcPts val="0"/>
               </a:spcAft>
             </a:pPr>
             <a:r>
-              <a:rPr sz="2200" b="1" i="0">
-                <a:solidFill>
-                  <a:srgbClr val="FFFFFF"/>
+              <a:rPr sz="2200" b="0" i="0">
+                <a:solidFill>
+                  <a:srgbClr val="DFEAF3"/>
                 </a:solidFill>
                 <a:latin typeface="Arial"/>
               </a:rPr>
@@ -3540,11 +3540,11 @@
           <a:p>
             <a:pPr algn="l">
               <a:spcAft>
-                <a:spcPts val="800"/>
+                <a:spcPts val="0"/>
               </a:spcAft>
             </a:pPr>
             <a:r>
-              <a:rPr sz="1800" b="0" i="0">
+              <a:rPr sz="2200" b="0" i="0">
                 <a:solidFill>
                   <a:srgbClr val="DFEAF3"/>
                 </a:solidFill>
@@ -3556,11 +3556,11 @@
           <a:p>
             <a:pPr algn="l">
               <a:spcAft>
-                <a:spcPts val="800"/>
+                <a:spcPts val="0"/>
               </a:spcAft>
             </a:pPr>
             <a:r>
-              <a:rPr sz="1800" b="0" i="0">
+              <a:rPr sz="2200" b="0" i="0">
                 <a:solidFill>
                   <a:srgbClr val="DFEAF3"/>
                 </a:solidFill>
@@ -3572,731 +3572,144 @@
           <a:p>
             <a:pPr algn="l">
               <a:spcAft>
-                <a:spcPts val="800"/>
+                <a:spcPts val="0"/>
               </a:spcAft>
             </a:pPr>
             <a:r>
-              <a:rPr sz="1800" b="0" i="0">
+              <a:rPr sz="2200" b="0" i="0">
                 <a:solidFill>
                   <a:srgbClr val="DFEAF3"/>
                 </a:solidFill>
                 <a:latin typeface="Arial"/>
               </a:rPr>
-              <a:t>Team number: 10</a:t>
-            </a:r>
-          </a:p>
-        </p:txBody>
-      </p:sp>
-      <p:sp>
-        <p:nvSpPr>
-          <p:cNvPr id="7" name="TextBox 6"/>
-          <p:cNvSpPr txBox="1"/>
-          <p:nvPr/>
-        </p:nvSpPr>
-        <p:spPr>
-          <a:xfrm>
-            <a:off x="722376" y="3977639"/>
-            <a:ext cx="5486400" cy="1463040"/>
-          </a:xfrm>
-          <a:prstGeom prst="rect">
-            <a:avLst/>
-          </a:prstGeom>
-          <a:noFill/>
-        </p:spPr>
-        <p:txBody>
-          <a:bodyPr wrap="square" anchor="t" lIns="0" rIns="0" tIns="0" bIns="0">
-            <a:spAutoFit/>
-          </a:bodyPr>
-          <a:lstStyle/>
+              <a:t/>
+            </a:r>
+          </a:p>
           <a:p>
             <a:pPr algn="l">
               <a:spcAft>
-                <a:spcPts val="600"/>
+                <a:spcPts val="0"/>
               </a:spcAft>
             </a:pPr>
             <a:r>
-              <a:rPr sz="1600" b="0" i="1">
-                <a:solidFill>
-                  <a:srgbClr val="C9DCEB"/>
-                </a:solidFill>
-                <a:latin typeface="Arial"/>
-              </a:rPr>
-              <a:t>1,137,987 Play Store reviews · 11 apps · 3 domains</a:t>
+              <a:rPr sz="2200" b="0" i="0">
+                <a:solidFill>
+                  <a:srgbClr val="DFEAF3"/>
+                </a:solidFill>
+                <a:latin typeface="Arial"/>
+              </a:rPr>
+              <a:t>Team number: 10</a:t>
             </a:r>
           </a:p>
           <a:p>
             <a:pPr algn="l">
               <a:spcAft>
-                <a:spcPts val="600"/>
+                <a:spcPts val="0"/>
               </a:spcAft>
             </a:pPr>
             <a:r>
-              <a:rPr sz="1400" b="0" i="0">
-                <a:solidFill>
-                  <a:srgbClr val="C9DCEB"/>
-                </a:solidFill>
-                <a:latin typeface="Arial"/>
-              </a:rPr>
-              <a:t>Collected ourselves with google-play-scraper, 1 Apr – 20 Sep 2026</a:t>
-            </a:r>
-          </a:p>
-        </p:txBody>
-      </p:sp>
-      <p:sp>
-        <p:nvSpPr>
-          <p:cNvPr id="8" name="TextBox 7"/>
-          <p:cNvSpPr txBox="1"/>
-          <p:nvPr/>
-        </p:nvSpPr>
-        <p:spPr>
-          <a:xfrm>
-            <a:off x="6812280" y="1600200"/>
-            <a:ext cx="4663440" cy="365760"/>
-          </a:xfrm>
-          <a:prstGeom prst="rect">
-            <a:avLst/>
-          </a:prstGeom>
-          <a:noFill/>
-        </p:spPr>
-        <p:txBody>
-          <a:bodyPr wrap="square" anchor="t" lIns="0" rIns="0" tIns="0" bIns="0">
-            <a:spAutoFit/>
-          </a:bodyPr>
-          <a:lstStyle/>
-          <a:p>
-            <a:pPr algn="l">
+              <a:rPr sz="2200" b="0" i="0">
+                <a:solidFill>
+                  <a:srgbClr val="DFEAF3"/>
+                </a:solidFill>
+                <a:latin typeface="Arial"/>
+              </a:rPr>
+              <a:t>Members:</a:t>
+            </a:r>
+          </a:p>
+          <a:p>
+            <a:pPr algn="l" marL="274320">
+              <a:tabLst>
+                <a:tab pos="3383280" algn="l"/>
+              </a:tabLst>
               <a:spcAft>
-                <a:spcPts val="600"/>
+                <a:spcPts val="0"/>
               </a:spcAft>
             </a:pPr>
             <a:r>
-              <a:rPr sz="1800" b="1" i="0">
-                <a:solidFill>
-                  <a:srgbClr val="FFFFFF"/>
-                </a:solidFill>
-                <a:latin typeface="Arial"/>
-              </a:rPr>
-              <a:t>Members</a:t>
-            </a:r>
-          </a:p>
-        </p:txBody>
-      </p:sp>
-      <p:sp>
-        <p:nvSpPr>
-          <p:cNvPr id="9" name="Rounded Rectangle 8"/>
-          <p:cNvSpPr/>
-          <p:nvPr/>
-        </p:nvSpPr>
-        <p:spPr>
-          <a:xfrm>
-            <a:off x="6812280" y="2103120"/>
-            <a:ext cx="4663440" cy="548640"/>
-          </a:xfrm>
-          <a:prstGeom prst="roundRect">
-            <a:avLst>
-              <a:gd name="adj" fmla="val 6000"/>
-            </a:avLst>
-          </a:prstGeom>
-          <a:solidFill>
-            <a:srgbClr val="1E3A55"/>
-          </a:solidFill>
-          <a:ln w="9525">
-            <a:solidFill>
-              <a:srgbClr val="2C4A66"/>
-            </a:solidFill>
-          </a:ln>
-          <a:effectLst/>
-        </p:spPr>
-        <p:style>
-          <a:lnRef idx="1">
-            <a:schemeClr val="accent1"/>
-          </a:lnRef>
-          <a:fillRef idx="3">
-            <a:schemeClr val="accent1"/>
-          </a:fillRef>
-          <a:effectRef idx="2">
-            <a:schemeClr val="accent1"/>
-          </a:effectRef>
-          <a:fontRef idx="minor">
-            <a:schemeClr val="lt1"/>
-          </a:fontRef>
-        </p:style>
-        <p:txBody>
-          <a:bodyPr rtlCol="0" anchor="ctr"/>
-          <a:lstStyle/>
-          <a:p/>
-        </p:txBody>
-      </p:sp>
-      <p:sp>
-        <p:nvSpPr>
-          <p:cNvPr id="10" name="TextBox 9"/>
-          <p:cNvSpPr txBox="1"/>
-          <p:nvPr/>
-        </p:nvSpPr>
-        <p:spPr>
-          <a:xfrm>
-            <a:off x="6995160" y="2103120"/>
-            <a:ext cx="2743200" cy="548640"/>
-          </a:xfrm>
-          <a:prstGeom prst="rect">
-            <a:avLst/>
-          </a:prstGeom>
-          <a:noFill/>
-        </p:spPr>
-        <p:txBody>
-          <a:bodyPr wrap="square" anchor="ctr" lIns="0" rIns="0" tIns="0" bIns="0">
-            <a:spAutoFit/>
-          </a:bodyPr>
-          <a:lstStyle/>
-          <a:p>
-            <a:pPr algn="l">
+              <a:rPr sz="2000" b="0" i="0">
+                <a:solidFill>
+                  <a:srgbClr val="DFEAF3"/>
+                </a:solidFill>
+                <a:latin typeface="Arial"/>
+              </a:rPr>
+              <a:t>Aditya Monish Kumar K	-  CB.SC.U4CSE23103</a:t>
+            </a:r>
+          </a:p>
+          <a:p>
+            <a:pPr algn="l" marL="274320">
+              <a:tabLst>
+                <a:tab pos="3383280" algn="l"/>
+              </a:tabLst>
               <a:spcAft>
-                <a:spcPts val="600"/>
+                <a:spcPts val="0"/>
               </a:spcAft>
             </a:pPr>
             <a:r>
-              <a:rPr sz="1500" b="1" i="0">
-                <a:solidFill>
-                  <a:srgbClr val="FFFFFF"/>
-                </a:solidFill>
-                <a:latin typeface="Arial"/>
-              </a:rPr>
-              <a:t>Aditya Monish Kumar K</a:t>
-            </a:r>
-          </a:p>
-        </p:txBody>
-      </p:sp>
-      <p:sp>
-        <p:nvSpPr>
-          <p:cNvPr id="11" name="TextBox 10"/>
-          <p:cNvSpPr txBox="1"/>
-          <p:nvPr/>
-        </p:nvSpPr>
-        <p:spPr>
-          <a:xfrm>
-            <a:off x="9555480" y="2103120"/>
-            <a:ext cx="1783080" cy="548640"/>
-          </a:xfrm>
-          <a:prstGeom prst="rect">
-            <a:avLst/>
-          </a:prstGeom>
-          <a:noFill/>
-        </p:spPr>
-        <p:txBody>
-          <a:bodyPr wrap="square" anchor="ctr" lIns="0" rIns="0" tIns="0" bIns="0">
-            <a:spAutoFit/>
-          </a:bodyPr>
-          <a:lstStyle/>
-          <a:p>
-            <a:pPr algn="r">
+              <a:rPr sz="2000" b="0" i="0">
+                <a:solidFill>
+                  <a:srgbClr val="DFEAF3"/>
+                </a:solidFill>
+                <a:latin typeface="Arial"/>
+              </a:rPr>
+              <a:t>Regella Krishna Saketh	-  CB.SC.U4CSE23649</a:t>
+            </a:r>
+          </a:p>
+          <a:p>
+            <a:pPr algn="l" marL="274320">
+              <a:tabLst>
+                <a:tab pos="3383280" algn="l"/>
+              </a:tabLst>
               <a:spcAft>
-                <a:spcPts val="600"/>
+                <a:spcPts val="0"/>
               </a:spcAft>
             </a:pPr>
             <a:r>
-              <a:rPr sz="1300" b="0" i="0">
-                <a:solidFill>
-                  <a:srgbClr val="C9DCEB"/>
-                </a:solidFill>
-                <a:latin typeface="Arial"/>
-              </a:rPr>
-              <a:t>CB.SC.U4CSE23103</a:t>
-            </a:r>
-          </a:p>
-        </p:txBody>
-      </p:sp>
-      <p:sp>
-        <p:nvSpPr>
-          <p:cNvPr id="12" name="Rounded Rectangle 11"/>
-          <p:cNvSpPr/>
-          <p:nvPr/>
-        </p:nvSpPr>
-        <p:spPr>
-          <a:xfrm>
-            <a:off x="6812280" y="2761487"/>
-            <a:ext cx="4663440" cy="548640"/>
-          </a:xfrm>
-          <a:prstGeom prst="roundRect">
-            <a:avLst>
-              <a:gd name="adj" fmla="val 6000"/>
-            </a:avLst>
-          </a:prstGeom>
-          <a:solidFill>
-            <a:srgbClr val="1E3A55"/>
-          </a:solidFill>
-          <a:ln w="9525">
-            <a:solidFill>
-              <a:srgbClr val="2C4A66"/>
-            </a:solidFill>
-          </a:ln>
-          <a:effectLst/>
-        </p:spPr>
-        <p:style>
-          <a:lnRef idx="1">
-            <a:schemeClr val="accent1"/>
-          </a:lnRef>
-          <a:fillRef idx="3">
-            <a:schemeClr val="accent1"/>
-          </a:fillRef>
-          <a:effectRef idx="2">
-            <a:schemeClr val="accent1"/>
-          </a:effectRef>
-          <a:fontRef idx="minor">
-            <a:schemeClr val="lt1"/>
-          </a:fontRef>
-        </p:style>
-        <p:txBody>
-          <a:bodyPr rtlCol="0" anchor="ctr"/>
-          <a:lstStyle/>
-          <a:p/>
-        </p:txBody>
-      </p:sp>
-      <p:sp>
-        <p:nvSpPr>
-          <p:cNvPr id="13" name="TextBox 12"/>
-          <p:cNvSpPr txBox="1"/>
-          <p:nvPr/>
-        </p:nvSpPr>
-        <p:spPr>
-          <a:xfrm>
-            <a:off x="6995160" y="2761487"/>
-            <a:ext cx="2743200" cy="548640"/>
-          </a:xfrm>
-          <a:prstGeom prst="rect">
-            <a:avLst/>
-          </a:prstGeom>
-          <a:noFill/>
-        </p:spPr>
-        <p:txBody>
-          <a:bodyPr wrap="square" anchor="ctr" lIns="0" rIns="0" tIns="0" bIns="0">
-            <a:spAutoFit/>
-          </a:bodyPr>
-          <a:lstStyle/>
-          <a:p>
-            <a:pPr algn="l">
+              <a:rPr sz="2000" b="0" i="0">
+                <a:solidFill>
+                  <a:srgbClr val="DFEAF3"/>
+                </a:solidFill>
+                <a:latin typeface="Arial"/>
+              </a:rPr>
+              <a:t>Akshay KS	-  CB.SC.U4CSE23104</a:t>
+            </a:r>
+          </a:p>
+          <a:p>
+            <a:pPr algn="l" marL="274320">
+              <a:tabLst>
+                <a:tab pos="3383280" algn="l"/>
+              </a:tabLst>
               <a:spcAft>
-                <a:spcPts val="600"/>
+                <a:spcPts val="0"/>
               </a:spcAft>
             </a:pPr>
             <a:r>
-              <a:rPr sz="1500" b="1" i="0">
-                <a:solidFill>
-                  <a:srgbClr val="FFFFFF"/>
-                </a:solidFill>
-                <a:latin typeface="Arial"/>
-              </a:rPr>
-              <a:t>Regella Krishna Saketh</a:t>
-            </a:r>
-          </a:p>
-        </p:txBody>
-      </p:sp>
-      <p:sp>
-        <p:nvSpPr>
-          <p:cNvPr id="14" name="TextBox 13"/>
-          <p:cNvSpPr txBox="1"/>
-          <p:nvPr/>
-        </p:nvSpPr>
-        <p:spPr>
-          <a:xfrm>
-            <a:off x="9555480" y="2761487"/>
-            <a:ext cx="1783080" cy="548640"/>
-          </a:xfrm>
-          <a:prstGeom prst="rect">
-            <a:avLst/>
-          </a:prstGeom>
-          <a:noFill/>
-        </p:spPr>
-        <p:txBody>
-          <a:bodyPr wrap="square" anchor="ctr" lIns="0" rIns="0" tIns="0" bIns="0">
-            <a:spAutoFit/>
-          </a:bodyPr>
-          <a:lstStyle/>
-          <a:p>
-            <a:pPr algn="r">
+              <a:rPr sz="2000" b="0" i="0">
+                <a:solidFill>
+                  <a:srgbClr val="DFEAF3"/>
+                </a:solidFill>
+                <a:latin typeface="Arial"/>
+              </a:rPr>
+              <a:t>Harshini Vennela	-  CB.SC.U4CSE23455</a:t>
+            </a:r>
+          </a:p>
+          <a:p>
+            <a:pPr algn="l" marL="274320">
+              <a:tabLst>
+                <a:tab pos="3383280" algn="l"/>
+              </a:tabLst>
               <a:spcAft>
-                <a:spcPts val="600"/>
+                <a:spcPts val="0"/>
               </a:spcAft>
             </a:pPr>
             <a:r>
-              <a:rPr sz="1300" b="0" i="0">
-                <a:solidFill>
-                  <a:srgbClr val="C9DCEB"/>
-                </a:solidFill>
-                <a:latin typeface="Arial"/>
-              </a:rPr>
-              <a:t>CB.SC.U4CSE23649</a:t>
-            </a:r>
-          </a:p>
-        </p:txBody>
-      </p:sp>
-      <p:sp>
-        <p:nvSpPr>
-          <p:cNvPr id="15" name="Rounded Rectangle 14"/>
-          <p:cNvSpPr/>
-          <p:nvPr/>
-        </p:nvSpPr>
-        <p:spPr>
-          <a:xfrm>
-            <a:off x="6812280" y="3419856"/>
-            <a:ext cx="4663440" cy="548640"/>
-          </a:xfrm>
-          <a:prstGeom prst="roundRect">
-            <a:avLst>
-              <a:gd name="adj" fmla="val 6000"/>
-            </a:avLst>
-          </a:prstGeom>
-          <a:solidFill>
-            <a:srgbClr val="1E3A55"/>
-          </a:solidFill>
-          <a:ln w="9525">
-            <a:solidFill>
-              <a:srgbClr val="2C4A66"/>
-            </a:solidFill>
-          </a:ln>
-          <a:effectLst/>
-        </p:spPr>
-        <p:style>
-          <a:lnRef idx="1">
-            <a:schemeClr val="accent1"/>
-          </a:lnRef>
-          <a:fillRef idx="3">
-            <a:schemeClr val="accent1"/>
-          </a:fillRef>
-          <a:effectRef idx="2">
-            <a:schemeClr val="accent1"/>
-          </a:effectRef>
-          <a:fontRef idx="minor">
-            <a:schemeClr val="lt1"/>
-          </a:fontRef>
-        </p:style>
-        <p:txBody>
-          <a:bodyPr rtlCol="0" anchor="ctr"/>
-          <a:lstStyle/>
-          <a:p/>
-        </p:txBody>
-      </p:sp>
-      <p:sp>
-        <p:nvSpPr>
-          <p:cNvPr id="16" name="TextBox 15"/>
-          <p:cNvSpPr txBox="1"/>
-          <p:nvPr/>
-        </p:nvSpPr>
-        <p:spPr>
-          <a:xfrm>
-            <a:off x="6995160" y="3419856"/>
-            <a:ext cx="2743200" cy="548640"/>
-          </a:xfrm>
-          <a:prstGeom prst="rect">
-            <a:avLst/>
-          </a:prstGeom>
-          <a:noFill/>
-        </p:spPr>
-        <p:txBody>
-          <a:bodyPr wrap="square" anchor="ctr" lIns="0" rIns="0" tIns="0" bIns="0">
-            <a:spAutoFit/>
-          </a:bodyPr>
-          <a:lstStyle/>
-          <a:p>
-            <a:pPr algn="l">
-              <a:spcAft>
-                <a:spcPts val="600"/>
-              </a:spcAft>
-            </a:pPr>
-            <a:r>
-              <a:rPr sz="1500" b="1" i="0">
-                <a:solidFill>
-                  <a:srgbClr val="FFFFFF"/>
-                </a:solidFill>
-                <a:latin typeface="Arial"/>
-              </a:rPr>
-              <a:t>Akshay KS</a:t>
-            </a:r>
-          </a:p>
-        </p:txBody>
-      </p:sp>
-      <p:sp>
-        <p:nvSpPr>
-          <p:cNvPr id="17" name="TextBox 16"/>
-          <p:cNvSpPr txBox="1"/>
-          <p:nvPr/>
-        </p:nvSpPr>
-        <p:spPr>
-          <a:xfrm>
-            <a:off x="9555480" y="3419856"/>
-            <a:ext cx="1783080" cy="548640"/>
-          </a:xfrm>
-          <a:prstGeom prst="rect">
-            <a:avLst/>
-          </a:prstGeom>
-          <a:noFill/>
-        </p:spPr>
-        <p:txBody>
-          <a:bodyPr wrap="square" anchor="ctr" lIns="0" rIns="0" tIns="0" bIns="0">
-            <a:spAutoFit/>
-          </a:bodyPr>
-          <a:lstStyle/>
-          <a:p>
-            <a:pPr algn="r">
-              <a:spcAft>
-                <a:spcPts val="600"/>
-              </a:spcAft>
-            </a:pPr>
-            <a:r>
-              <a:rPr sz="1300" b="0" i="0">
-                <a:solidFill>
-                  <a:srgbClr val="C9DCEB"/>
-                </a:solidFill>
-                <a:latin typeface="Arial"/>
-              </a:rPr>
-              <a:t>CB.SC.U4CSE23104</a:t>
-            </a:r>
-          </a:p>
-        </p:txBody>
-      </p:sp>
-      <p:sp>
-        <p:nvSpPr>
-          <p:cNvPr id="18" name="Rounded Rectangle 17"/>
-          <p:cNvSpPr/>
-          <p:nvPr/>
-        </p:nvSpPr>
-        <p:spPr>
-          <a:xfrm>
-            <a:off x="6812280" y="4078224"/>
-            <a:ext cx="4663440" cy="548640"/>
-          </a:xfrm>
-          <a:prstGeom prst="roundRect">
-            <a:avLst>
-              <a:gd name="adj" fmla="val 6000"/>
-            </a:avLst>
-          </a:prstGeom>
-          <a:solidFill>
-            <a:srgbClr val="1E3A55"/>
-          </a:solidFill>
-          <a:ln w="9525">
-            <a:solidFill>
-              <a:srgbClr val="2C4A66"/>
-            </a:solidFill>
-          </a:ln>
-          <a:effectLst/>
-        </p:spPr>
-        <p:style>
-          <a:lnRef idx="1">
-            <a:schemeClr val="accent1"/>
-          </a:lnRef>
-          <a:fillRef idx="3">
-            <a:schemeClr val="accent1"/>
-          </a:fillRef>
-          <a:effectRef idx="2">
-            <a:schemeClr val="accent1"/>
-          </a:effectRef>
-          <a:fontRef idx="minor">
-            <a:schemeClr val="lt1"/>
-          </a:fontRef>
-        </p:style>
-        <p:txBody>
-          <a:bodyPr rtlCol="0" anchor="ctr"/>
-          <a:lstStyle/>
-          <a:p/>
-        </p:txBody>
-      </p:sp>
-      <p:sp>
-        <p:nvSpPr>
-          <p:cNvPr id="19" name="TextBox 18"/>
-          <p:cNvSpPr txBox="1"/>
-          <p:nvPr/>
-        </p:nvSpPr>
-        <p:spPr>
-          <a:xfrm>
-            <a:off x="6995160" y="4078224"/>
-            <a:ext cx="2743200" cy="548640"/>
-          </a:xfrm>
-          <a:prstGeom prst="rect">
-            <a:avLst/>
-          </a:prstGeom>
-          <a:noFill/>
-        </p:spPr>
-        <p:txBody>
-          <a:bodyPr wrap="square" anchor="ctr" lIns="0" rIns="0" tIns="0" bIns="0">
-            <a:spAutoFit/>
-          </a:bodyPr>
-          <a:lstStyle/>
-          <a:p>
-            <a:pPr algn="l">
-              <a:spcAft>
-                <a:spcPts val="600"/>
-              </a:spcAft>
-            </a:pPr>
-            <a:r>
-              <a:rPr sz="1500" b="1" i="0">
-                <a:solidFill>
-                  <a:srgbClr val="FFFFFF"/>
-                </a:solidFill>
-                <a:latin typeface="Arial"/>
-              </a:rPr>
-              <a:t>Harshini Vennela</a:t>
-            </a:r>
-          </a:p>
-        </p:txBody>
-      </p:sp>
-      <p:sp>
-        <p:nvSpPr>
-          <p:cNvPr id="20" name="TextBox 19"/>
-          <p:cNvSpPr txBox="1"/>
-          <p:nvPr/>
-        </p:nvSpPr>
-        <p:spPr>
-          <a:xfrm>
-            <a:off x="9555480" y="4078224"/>
-            <a:ext cx="1783080" cy="548640"/>
-          </a:xfrm>
-          <a:prstGeom prst="rect">
-            <a:avLst/>
-          </a:prstGeom>
-          <a:noFill/>
-        </p:spPr>
-        <p:txBody>
-          <a:bodyPr wrap="square" anchor="ctr" lIns="0" rIns="0" tIns="0" bIns="0">
-            <a:spAutoFit/>
-          </a:bodyPr>
-          <a:lstStyle/>
-          <a:p>
-            <a:pPr algn="r">
-              <a:spcAft>
-                <a:spcPts val="600"/>
-              </a:spcAft>
-            </a:pPr>
-            <a:r>
-              <a:rPr sz="1300" b="0" i="0">
-                <a:solidFill>
-                  <a:srgbClr val="C9DCEB"/>
-                </a:solidFill>
-                <a:latin typeface="Arial"/>
-              </a:rPr>
-              <a:t>CB.SC.U4CSE23455</a:t>
-            </a:r>
-          </a:p>
-        </p:txBody>
-      </p:sp>
-      <p:sp>
-        <p:nvSpPr>
-          <p:cNvPr id="21" name="Rounded Rectangle 20"/>
-          <p:cNvSpPr/>
-          <p:nvPr/>
-        </p:nvSpPr>
-        <p:spPr>
-          <a:xfrm>
-            <a:off x="6812280" y="4736592"/>
-            <a:ext cx="4663440" cy="548640"/>
-          </a:xfrm>
-          <a:prstGeom prst="roundRect">
-            <a:avLst>
-              <a:gd name="adj" fmla="val 6000"/>
-            </a:avLst>
-          </a:prstGeom>
-          <a:solidFill>
-            <a:srgbClr val="1E3A55"/>
-          </a:solidFill>
-          <a:ln w="9525">
-            <a:solidFill>
-              <a:srgbClr val="2C4A66"/>
-            </a:solidFill>
-          </a:ln>
-          <a:effectLst/>
-        </p:spPr>
-        <p:style>
-          <a:lnRef idx="1">
-            <a:schemeClr val="accent1"/>
-          </a:lnRef>
-          <a:fillRef idx="3">
-            <a:schemeClr val="accent1"/>
-          </a:fillRef>
-          <a:effectRef idx="2">
-            <a:schemeClr val="accent1"/>
-          </a:effectRef>
-          <a:fontRef idx="minor">
-            <a:schemeClr val="lt1"/>
-          </a:fontRef>
-        </p:style>
-        <p:txBody>
-          <a:bodyPr rtlCol="0" anchor="ctr"/>
-          <a:lstStyle/>
-          <a:p/>
-        </p:txBody>
-      </p:sp>
-      <p:sp>
-        <p:nvSpPr>
-          <p:cNvPr id="22" name="TextBox 21"/>
-          <p:cNvSpPr txBox="1"/>
-          <p:nvPr/>
-        </p:nvSpPr>
-        <p:spPr>
-          <a:xfrm>
-            <a:off x="6995160" y="4736592"/>
-            <a:ext cx="2743200" cy="548640"/>
-          </a:xfrm>
-          <a:prstGeom prst="rect">
-            <a:avLst/>
-          </a:prstGeom>
-          <a:noFill/>
-        </p:spPr>
-        <p:txBody>
-          <a:bodyPr wrap="square" anchor="ctr" lIns="0" rIns="0" tIns="0" bIns="0">
-            <a:spAutoFit/>
-          </a:bodyPr>
-          <a:lstStyle/>
-          <a:p>
-            <a:pPr algn="l">
-              <a:spcAft>
-                <a:spcPts val="600"/>
-              </a:spcAft>
-            </a:pPr>
-            <a:r>
-              <a:rPr sz="1500" b="1" i="0">
-                <a:solidFill>
-                  <a:srgbClr val="FFFFFF"/>
-                </a:solidFill>
-                <a:latin typeface="Arial"/>
-              </a:rPr>
-              <a:t>Kanishka D</a:t>
-            </a:r>
-          </a:p>
-        </p:txBody>
-      </p:sp>
-      <p:sp>
-        <p:nvSpPr>
-          <p:cNvPr id="23" name="TextBox 22"/>
-          <p:cNvSpPr txBox="1"/>
-          <p:nvPr/>
-        </p:nvSpPr>
-        <p:spPr>
-          <a:xfrm>
-            <a:off x="9555480" y="4736592"/>
-            <a:ext cx="1783080" cy="548640"/>
-          </a:xfrm>
-          <a:prstGeom prst="rect">
-            <a:avLst/>
-          </a:prstGeom>
-          <a:noFill/>
-        </p:spPr>
-        <p:txBody>
-          <a:bodyPr wrap="square" anchor="ctr" lIns="0" rIns="0" tIns="0" bIns="0">
-            <a:spAutoFit/>
-          </a:bodyPr>
-          <a:lstStyle/>
-          <a:p>
-            <a:pPr algn="r">
-              <a:spcAft>
-                <a:spcPts val="600"/>
-              </a:spcAft>
-            </a:pPr>
-            <a:r>
-              <a:rPr sz="1300" b="0" i="0">
-                <a:solidFill>
-                  <a:srgbClr val="C9DCEB"/>
-                </a:solidFill>
-                <a:latin typeface="Arial"/>
-              </a:rPr>
-              <a:t>CB.SC.U4CSE23155</a:t>
+              <a:rPr sz="2000" b="0" i="0">
+                <a:solidFill>
+                  <a:srgbClr val="DFEAF3"/>
+                </a:solidFill>
+                <a:latin typeface="Arial"/>
+              </a:rPr>
+              <a:t>Kanishka D	-  CB.SC.U4CSE23155</a:t>
             </a:r>
           </a:p>
         </p:txBody>
@@ -5004,503 +4417,6 @@
           </a:p>
         </p:txBody>
       </p:sp>
-      <p:graphicFrame>
-        <p:nvGraphicFramePr>
-          <p:cNvPr id="19" name="Table 18"/>
-          <p:cNvGraphicFramePr>
-            <a:graphicFrameLocks noGrp="1"/>
-          </p:cNvGraphicFramePr>
-          <p:nvPr/>
-        </p:nvGraphicFramePr>
-        <p:xfrm>
-          <a:off x="722376" y="2560320"/>
-          <a:ext cx="10753344" cy="1316736"/>
-        </p:xfrm>
-        <a:graphic>
-          <a:graphicData uri="http://schemas.openxmlformats.org/drawingml/2006/table">
-            <a:tbl>
-              <a:tblPr firstRow="0" bandRow="0">
-                <a:tableStyleId>{5940675A-B579-460E-94D1-54222C63F5DA}</a:tableStyleId>
-              </a:tblPr>
-              <a:tblGrid>
-                <a:gridCol w="2148840"/>
-                <a:gridCol w="4754880"/>
-                <a:gridCol w="777240"/>
-                <a:gridCol w="1143000"/>
-                <a:gridCol w="1929384"/>
-              </a:tblGrid>
-              <a:tr h="329184">
-                <a:tc>
-                  <a:txBody>
-                    <a:bodyPr wrap="square"/>
-                    <a:lstStyle/>
-                    <a:p>
-                      <a:pPr algn="l"/>
-                      <a:r>
-                        <a:rPr sz="1150" b="1" i="0">
-                          <a:solidFill>
-                            <a:srgbClr val="FFFFFF"/>
-                          </a:solidFill>
-                          <a:latin typeface="Arial"/>
-                        </a:rPr>
-                        <a:t>Assignees</a:t>
-                      </a:r>
-                    </a:p>
-                  </a:txBody>
-                  <a:tcPr marL="64008" marR="64008" marT="27432" marB="27432" anchor="ctr">
-                    <a:solidFill>
-                      <a:srgbClr val="132C43"/>
-                    </a:solidFill>
-                  </a:tcPr>
-                </a:tc>
-                <a:tc>
-                  <a:txBody>
-                    <a:bodyPr wrap="square"/>
-                    <a:lstStyle/>
-                    <a:p>
-                      <a:pPr algn="l"/>
-                      <a:r>
-                        <a:rPr sz="1150" b="1" i="0">
-                          <a:solidFill>
-                            <a:srgbClr val="FFFFFF"/>
-                          </a:solidFill>
-                          <a:latin typeface="Arial"/>
-                        </a:rPr>
-                        <a:t>Board tasks (issues)</a:t>
-                      </a:r>
-                    </a:p>
-                  </a:txBody>
-                  <a:tcPr marL="64008" marR="64008" marT="27432" marB="27432" anchor="ctr">
-                    <a:solidFill>
-                      <a:srgbClr val="132C43"/>
-                    </a:solidFill>
-                  </a:tcPr>
-                </a:tc>
-                <a:tc>
-                  <a:txBody>
-                    <a:bodyPr wrap="square"/>
-                    <a:lstStyle/>
-                    <a:p>
-                      <a:pPr algn="l"/>
-                      <a:r>
-                        <a:rPr sz="1150" b="1" i="0">
-                          <a:solidFill>
-                            <a:srgbClr val="FFFFFF"/>
-                          </a:solidFill>
-                          <a:latin typeface="Arial"/>
-                        </a:rPr>
-                        <a:t>Due</a:t>
-                      </a:r>
-                    </a:p>
-                  </a:txBody>
-                  <a:tcPr marL="64008" marR="64008" marT="27432" marB="27432" anchor="ctr">
-                    <a:solidFill>
-                      <a:srgbClr val="132C43"/>
-                    </a:solidFill>
-                  </a:tcPr>
-                </a:tc>
-                <a:tc>
-                  <a:txBody>
-                    <a:bodyPr wrap="square"/>
-                    <a:lstStyle/>
-                    <a:p>
-                      <a:pPr algn="l"/>
-                      <a:r>
-                        <a:rPr sz="1150" b="1" i="0">
-                          <a:solidFill>
-                            <a:srgbClr val="FFFFFF"/>
-                          </a:solidFill>
-                          <a:latin typeface="Arial"/>
-                        </a:rPr>
-                        <a:t>Status</a:t>
-                      </a:r>
-                    </a:p>
-                  </a:txBody>
-                  <a:tcPr marL="64008" marR="64008" marT="27432" marB="27432" anchor="ctr">
-                    <a:solidFill>
-                      <a:srgbClr val="132C43"/>
-                    </a:solidFill>
-                  </a:tcPr>
-                </a:tc>
-                <a:tc>
-                  <a:txBody>
-                    <a:bodyPr wrap="square"/>
-                    <a:lstStyle/>
-                    <a:p>
-                      <a:pPr algn="l"/>
-                      <a:r>
-                        <a:rPr sz="1150" b="1" i="0">
-                          <a:solidFill>
-                            <a:srgbClr val="FFFFFF"/>
-                          </a:solidFill>
-                          <a:latin typeface="Arial"/>
-                        </a:rPr>
-                        <a:t>Evidence (merged PRs)</a:t>
-                      </a:r>
-                    </a:p>
-                  </a:txBody>
-                  <a:tcPr marL="64008" marR="64008" marT="27432" marB="27432" anchor="ctr">
-                    <a:solidFill>
-                      <a:srgbClr val="132C43"/>
-                    </a:solidFill>
-                  </a:tcPr>
-                </a:tc>
-              </a:tr>
-              <a:tr h="329184">
-                <a:tc>
-                  <a:txBody>
-                    <a:bodyPr wrap="square"/>
-                    <a:lstStyle/>
-                    <a:p>
-                      <a:pPr algn="l"/>
-                      <a:r>
-                        <a:rPr sz="1150" b="1" i="0">
-                          <a:solidFill>
-                            <a:srgbClr val="263C50"/>
-                          </a:solidFill>
-                          <a:latin typeface="Arial"/>
-                        </a:rPr>
-                        <a:t>Aditya</a:t>
-                      </a:r>
-                    </a:p>
-                  </a:txBody>
-                  <a:tcPr marL="64008" marR="64008" marT="27432" marB="27432" anchor="ctr">
-                    <a:solidFill>
-                      <a:srgbClr val="FFFFFF"/>
-                    </a:solidFill>
-                  </a:tcPr>
-                </a:tc>
-                <a:tc>
-                  <a:txBody>
-                    <a:bodyPr wrap="square"/>
-                    <a:lstStyle/>
-                    <a:p>
-                      <a:pPr algn="l"/>
-                      <a:r>
-                        <a:rPr sz="1150" b="0" i="0">
-                          <a:solidFill>
-                            <a:srgbClr val="263C50"/>
-                          </a:solidFill>
-                          <a:latin typeface="Arial"/>
-                        </a:rPr>
-                        <a:t>#53, #54, #56–#58 (5): scraper, collection, cleaning, tests</a:t>
-                      </a:r>
-                    </a:p>
-                  </a:txBody>
-                  <a:tcPr marL="64008" marR="64008" marT="27432" marB="27432" anchor="ctr">
-                    <a:solidFill>
-                      <a:srgbClr val="FFFFFF"/>
-                    </a:solidFill>
-                  </a:tcPr>
-                </a:tc>
-                <a:tc>
-                  <a:txBody>
-                    <a:bodyPr wrap="square"/>
-                    <a:lstStyle/>
-                    <a:p>
-                      <a:pPr algn="l"/>
-                      <a:r>
-                        <a:rPr sz="1150" b="0" i="0">
-                          <a:solidFill>
-                            <a:srgbClr val="263C50"/>
-                          </a:solidFill>
-                          <a:latin typeface="Arial"/>
-                        </a:rPr>
-                        <a:t>29 Sep</a:t>
-                      </a:r>
-                    </a:p>
-                  </a:txBody>
-                  <a:tcPr marL="64008" marR="64008" marT="27432" marB="27432" anchor="ctr">
-                    <a:solidFill>
-                      <a:srgbClr val="FFFFFF"/>
-                    </a:solidFill>
-                  </a:tcPr>
-                </a:tc>
-                <a:tc>
-                  <a:txBody>
-                    <a:bodyPr wrap="square"/>
-                    <a:lstStyle/>
-                    <a:p>
-                      <a:pPr algn="l"/>
-                      <a:r>
-                        <a:rPr sz="1150" b="0" i="0">
-                          <a:solidFill>
-                            <a:srgbClr val="263C50"/>
-                          </a:solidFill>
-                          <a:latin typeface="Arial"/>
-                        </a:rPr>
-                        <a:t>Completed</a:t>
-                      </a:r>
-                    </a:p>
-                  </a:txBody>
-                  <a:tcPr marL="64008" marR="64008" marT="27432" marB="27432" anchor="ctr">
-                    <a:solidFill>
-                      <a:srgbClr val="FFFFFF"/>
-                    </a:solidFill>
-                  </a:tcPr>
-                </a:tc>
-                <a:tc>
-                  <a:txBody>
-                    <a:bodyPr wrap="square"/>
-                    <a:lstStyle/>
-                    <a:p>
-                      <a:pPr algn="l"/>
-                      <a:r>
-                        <a:rPr sz="1150" b="0" i="0">
-                          <a:solidFill>
-                            <a:srgbClr val="263C50"/>
-                          </a:solidFill>
-                          <a:latin typeface="Arial"/>
-                        </a:rPr>
-                        <a:t>PR #52, #99</a:t>
-                      </a:r>
-                    </a:p>
-                  </a:txBody>
-                  <a:tcPr marL="64008" marR="64008" marT="27432" marB="27432" anchor="ctr">
-                    <a:solidFill>
-                      <a:srgbClr val="FFFFFF"/>
-                    </a:solidFill>
-                  </a:tcPr>
-                </a:tc>
-              </a:tr>
-              <a:tr h="329184">
-                <a:tc>
-                  <a:txBody>
-                    <a:bodyPr wrap="square"/>
-                    <a:lstStyle/>
-                    <a:p>
-                      <a:pPr algn="l"/>
-                      <a:r>
-                        <a:rPr sz="1150" b="1" i="0">
-                          <a:solidFill>
-                            <a:srgbClr val="263C50"/>
-                          </a:solidFill>
-                          <a:latin typeface="Arial"/>
-                        </a:rPr>
-                        <a:t>Akshay, Saketh</a:t>
-                      </a:r>
-                    </a:p>
-                  </a:txBody>
-                  <a:tcPr marL="64008" marR="64008" marT="27432" marB="27432" anchor="ctr">
-                    <a:solidFill>
-                      <a:srgbClr val="EAF0F6"/>
-                    </a:solidFill>
-                  </a:tcPr>
-                </a:tc>
-                <a:tc>
-                  <a:txBody>
-                    <a:bodyPr wrap="square"/>
-                    <a:lstStyle/>
-                    <a:p>
-                      <a:pPr algn="l"/>
-                      <a:r>
-                        <a:rPr sz="1150" b="0" i="0">
-                          <a:solidFill>
-                            <a:srgbClr val="263C50"/>
-                          </a:solidFill>
-                          <a:latin typeface="Arial"/>
-                        </a:rPr>
-                        <a:t>#104–#106, #118–#120 (6): EDA charts, tests, write-up</a:t>
-                      </a:r>
-                    </a:p>
-                  </a:txBody>
-                  <a:tcPr marL="64008" marR="64008" marT="27432" marB="27432" anchor="ctr">
-                    <a:solidFill>
-                      <a:srgbClr val="EAF0F6"/>
-                    </a:solidFill>
-                  </a:tcPr>
-                </a:tc>
-                <a:tc>
-                  <a:txBody>
-                    <a:bodyPr wrap="square"/>
-                    <a:lstStyle/>
-                    <a:p>
-                      <a:pPr algn="l"/>
-                      <a:r>
-                        <a:rPr sz="1150" b="0" i="0">
-                          <a:solidFill>
-                            <a:srgbClr val="263C50"/>
-                          </a:solidFill>
-                          <a:latin typeface="Arial"/>
-                        </a:rPr>
-                        <a:t>1 Oct</a:t>
-                      </a:r>
-                    </a:p>
-                  </a:txBody>
-                  <a:tcPr marL="64008" marR="64008" marT="27432" marB="27432" anchor="ctr">
-                    <a:solidFill>
-                      <a:srgbClr val="EAF0F6"/>
-                    </a:solidFill>
-                  </a:tcPr>
-                </a:tc>
-                <a:tc>
-                  <a:txBody>
-                    <a:bodyPr wrap="square"/>
-                    <a:lstStyle/>
-                    <a:p>
-                      <a:pPr algn="l"/>
-                      <a:r>
-                        <a:rPr sz="1150" b="0" i="0">
-                          <a:solidFill>
-                            <a:srgbClr val="263C50"/>
-                          </a:solidFill>
-                          <a:latin typeface="Arial"/>
-                        </a:rPr>
-                        <a:t>Completed</a:t>
-                      </a:r>
-                    </a:p>
-                  </a:txBody>
-                  <a:tcPr marL="64008" marR="64008" marT="27432" marB="27432" anchor="ctr">
-                    <a:solidFill>
-                      <a:srgbClr val="EAF0F6"/>
-                    </a:solidFill>
-                  </a:tcPr>
-                </a:tc>
-                <a:tc>
-                  <a:txBody>
-                    <a:bodyPr wrap="square"/>
-                    <a:lstStyle/>
-                    <a:p>
-                      <a:pPr algn="l"/>
-                      <a:r>
-                        <a:rPr sz="1150" b="0" i="0">
-                          <a:solidFill>
-                            <a:srgbClr val="263C50"/>
-                          </a:solidFill>
-                          <a:latin typeface="Arial"/>
-                        </a:rPr>
-                        <a:t>PR #121</a:t>
-                      </a:r>
-                    </a:p>
-                  </a:txBody>
-                  <a:tcPr marL="64008" marR="64008" marT="27432" marB="27432" anchor="ctr">
-                    <a:solidFill>
-                      <a:srgbClr val="EAF0F6"/>
-                    </a:solidFill>
-                  </a:tcPr>
-                </a:tc>
-              </a:tr>
-              <a:tr h="329184">
-                <a:tc>
-                  <a:txBody>
-                    <a:bodyPr wrap="square"/>
-                    <a:lstStyle/>
-                    <a:p>
-                      <a:pPr algn="l"/>
-                      <a:r>
-                        <a:rPr sz="1150" b="1" i="0">
-                          <a:solidFill>
-                            <a:srgbClr val="263C50"/>
-                          </a:solidFill>
-                          <a:latin typeface="Arial"/>
-                        </a:rPr>
-                        <a:t>Harshini, Kanishka</a:t>
-                      </a:r>
-                    </a:p>
-                  </a:txBody>
-                  <a:tcPr marL="64008" marR="64008" marT="27432" marB="27432" anchor="ctr">
-                    <a:solidFill>
-                      <a:srgbClr val="FFFFFF"/>
-                    </a:solidFill>
-                  </a:tcPr>
-                </a:tc>
-                <a:tc>
-                  <a:txBody>
-                    <a:bodyPr wrap="square"/>
-                    <a:lstStyle/>
-                    <a:p>
-                      <a:pPr algn="l"/>
-                      <a:r>
-                        <a:rPr sz="1150" b="0" i="0">
-                          <a:solidFill>
-                            <a:srgbClr val="263C50"/>
-                          </a:solidFill>
-                          <a:latin typeface="Arial"/>
-                        </a:rPr>
-                        <a:t>#107–#110 (4): features, classifiers, evaluation, write-up</a:t>
-                      </a:r>
-                    </a:p>
-                  </a:txBody>
-                  <a:tcPr marL="64008" marR="64008" marT="27432" marB="27432" anchor="ctr">
-                    <a:solidFill>
-                      <a:srgbClr val="FFFFFF"/>
-                    </a:solidFill>
-                  </a:tcPr>
-                </a:tc>
-                <a:tc>
-                  <a:txBody>
-                    <a:bodyPr wrap="square"/>
-                    <a:lstStyle/>
-                    <a:p>
-                      <a:pPr algn="l"/>
-                      <a:r>
-                        <a:rPr sz="1150" b="0" i="0">
-                          <a:solidFill>
-                            <a:srgbClr val="263C50"/>
-                          </a:solidFill>
-                          <a:latin typeface="Arial"/>
-                        </a:rPr>
-                        <a:t>1 Oct</a:t>
-                      </a:r>
-                    </a:p>
-                  </a:txBody>
-                  <a:tcPr marL="64008" marR="64008" marT="27432" marB="27432" anchor="ctr">
-                    <a:solidFill>
-                      <a:srgbClr val="FFFFFF"/>
-                    </a:solidFill>
-                  </a:tcPr>
-                </a:tc>
-                <a:tc>
-                  <a:txBody>
-                    <a:bodyPr wrap="square"/>
-                    <a:lstStyle/>
-                    <a:p>
-                      <a:pPr algn="l"/>
-                      <a:r>
-                        <a:rPr sz="1150" b="0" i="0">
-                          <a:solidFill>
-                            <a:srgbClr val="263C50"/>
-                          </a:solidFill>
-                          <a:latin typeface="Arial"/>
-                        </a:rPr>
-                        <a:t>Completed</a:t>
-                      </a:r>
-                    </a:p>
-                  </a:txBody>
-                  <a:tcPr marL="64008" marR="64008" marT="27432" marB="27432" anchor="ctr">
-                    <a:solidFill>
-                      <a:srgbClr val="FFFFFF"/>
-                    </a:solidFill>
-                  </a:tcPr>
-                </a:tc>
-                <a:tc>
-                  <a:txBody>
-                    <a:bodyPr wrap="square"/>
-                    <a:lstStyle/>
-                    <a:p>
-                      <a:pPr algn="l"/>
-                      <a:r>
-                        <a:rPr sz="1150" b="0" i="0">
-                          <a:solidFill>
-                            <a:srgbClr val="263C50"/>
-                          </a:solidFill>
-                          <a:latin typeface="Arial"/>
-                        </a:rPr>
-                        <a:t>PR #122–#125</a:t>
-                      </a:r>
-                    </a:p>
-                  </a:txBody>
-                  <a:tcPr marL="64008" marR="64008" marT="27432" marB="27432" anchor="ctr">
-                    <a:solidFill>
-                      <a:srgbClr val="FFFFFF"/>
-                    </a:solidFill>
-                  </a:tcPr>
-                </a:tc>
-              </a:tr>
-            </a:tbl>
-          </a:graphicData>
-        </a:graphic>
-      </p:graphicFrame>
       <p:sp>
         <p:nvSpPr>
           <p:cNvPr id="20" name="TextBox 19"/>
@@ -5509,7 +4425,7 @@
         </p:nvSpPr>
         <p:spPr>
           <a:xfrm>
-            <a:off x="722376" y="4069080"/>
+            <a:off x="722376" y="2606040"/>
             <a:ext cx="10753344" cy="320040"/>
           </a:xfrm>
           <a:prstGeom prst="rect">
@@ -5535,385 +4451,40 @@
                 </a:solidFill>
                 <a:latin typeface="Arial"/>
               </a:rPr>
-              <a:t>Evidence: </a:t>
-            </a:r>
-            <a:r>
-              <a:rPr sz="1250" b="0" i="0">
-                <a:solidFill>
-                  <a:srgbClr val="263C50"/>
-                </a:solidFill>
-                <a:latin typeface="Arial"/>
-              </a:rPr>
-              <a:t>every task is covered by a merged PR (10 linked to their issue; PR #121 names the other 5) plus its script, data, chart or document</a:t>
-            </a:r>
-          </a:p>
-        </p:txBody>
-      </p:sp>
-      <p:sp>
-        <p:nvSpPr>
-          <p:cNvPr id="21" name="TextBox 20"/>
-          <p:cNvSpPr txBox="1"/>
+              <a:t>Evidence and activity history:</a:t>
+            </a:r>
+          </a:p>
+        </p:txBody>
+      </p:sp>
+      <p:pic>
+        <p:nvPicPr>
+          <p:cNvPr id="21" name="Board screenshot" descr="board.png"/>
+          <p:cNvPicPr>
+            <a:picLocks noChangeAspect="1"/>
+          </p:cNvPicPr>
           <p:nvPr/>
-        </p:nvSpPr>
+        </p:nvPicPr>
+        <p:blipFill>
+          <a:blip r:embed="rId3"/>
+          <a:stretch>
+            <a:fillRect/>
+          </a:stretch>
+        </p:blipFill>
         <p:spPr>
           <a:xfrm>
-            <a:off x="722376" y="4389120"/>
-            <a:ext cx="2743200" cy="274320"/>
+            <a:off x="722376" y="2971800"/>
+            <a:ext cx="9219799" cy="3611880"/>
           </a:xfrm>
           <a:prstGeom prst="rect">
             <a:avLst/>
           </a:prstGeom>
-          <a:noFill/>
-        </p:spPr>
-        <p:txBody>
-          <a:bodyPr wrap="square" anchor="t" lIns="0" rIns="0" tIns="0" bIns="0">
-            <a:spAutoFit/>
-          </a:bodyPr>
-          <a:lstStyle/>
-          <a:p>
-            <a:pPr algn="l">
-              <a:spcAft>
-                <a:spcPts val="600"/>
-              </a:spcAft>
-            </a:pPr>
-            <a:r>
-              <a:rPr sz="1250" b="1" i="0">
-                <a:solidFill>
-                  <a:srgbClr val="132C43"/>
-                </a:solidFill>
-                <a:latin typeface="Arial"/>
-              </a:rPr>
-              <a:t>Activity history (PR merges)</a:t>
-            </a:r>
-          </a:p>
-        </p:txBody>
-      </p:sp>
-      <p:cxnSp>
-        <p:nvCxnSpPr>
-          <p:cNvPr id="22" name="Connector 21"/>
-          <p:cNvCxnSpPr/>
-          <p:nvPr/>
-        </p:nvCxnSpPr>
-        <p:spPr>
-          <a:xfrm>
-            <a:off x="914400" y="4837176"/>
-            <a:ext cx="9692640" cy="0"/>
-          </a:xfrm>
-          <a:prstGeom prst="line">
-            <a:avLst/>
-          </a:prstGeom>
-          <a:ln w="19050">
+          <a:ln w="9525">
             <a:solidFill>
               <a:srgbClr val="DAE2EB"/>
             </a:solidFill>
           </a:ln>
         </p:spPr>
-        <p:style>
-          <a:lnRef idx="2">
-            <a:schemeClr val="accent1"/>
-          </a:lnRef>
-          <a:fillRef idx="0">
-            <a:schemeClr val="accent1"/>
-          </a:fillRef>
-          <a:effectRef idx="1">
-            <a:schemeClr val="accent1"/>
-          </a:effectRef>
-          <a:fontRef idx="minor">
-            <a:schemeClr val="tx1"/>
-          </a:fontRef>
-        </p:style>
-      </p:cxnSp>
-      <p:sp>
-        <p:nvSpPr>
-          <p:cNvPr id="23" name="Oval 22"/>
-          <p:cNvSpPr/>
-          <p:nvPr/>
-        </p:nvSpPr>
-        <p:spPr>
-          <a:xfrm>
-            <a:off x="868680" y="4754880"/>
-            <a:ext cx="164592" cy="164592"/>
-          </a:xfrm>
-          <a:prstGeom prst="ellipse">
-            <a:avLst/>
-          </a:prstGeom>
-          <a:solidFill>
-            <a:srgbClr val="132C43"/>
-          </a:solidFill>
-          <a:ln>
-            <a:noFill/>
-          </a:ln>
-          <a:effectLst/>
-        </p:spPr>
-        <p:style>
-          <a:lnRef idx="1">
-            <a:schemeClr val="accent1"/>
-          </a:lnRef>
-          <a:fillRef idx="3">
-            <a:schemeClr val="accent1"/>
-          </a:fillRef>
-          <a:effectRef idx="2">
-            <a:schemeClr val="accent1"/>
-          </a:effectRef>
-          <a:fontRef idx="minor">
-            <a:schemeClr val="lt1"/>
-          </a:fontRef>
-        </p:style>
-        <p:txBody>
-          <a:bodyPr rtlCol="0" anchor="ctr"/>
-          <a:lstStyle/>
-          <a:p/>
-        </p:txBody>
-      </p:sp>
-      <p:sp>
-        <p:nvSpPr>
-          <p:cNvPr id="24" name="TextBox 23"/>
-          <p:cNvSpPr txBox="1"/>
-          <p:nvPr/>
-        </p:nvSpPr>
-        <p:spPr>
-          <a:xfrm>
-            <a:off x="850392" y="4965192"/>
-            <a:ext cx="2057400" cy="502920"/>
-          </a:xfrm>
-          <a:prstGeom prst="rect">
-            <a:avLst/>
-          </a:prstGeom>
-          <a:noFill/>
-        </p:spPr>
-        <p:txBody>
-          <a:bodyPr wrap="square" anchor="t" lIns="0" rIns="0" tIns="0" bIns="0">
-            <a:spAutoFit/>
-          </a:bodyPr>
-          <a:lstStyle/>
-          <a:p>
-            <a:pPr algn="l">
-              <a:spcAft>
-                <a:spcPts val="0"/>
-              </a:spcAft>
-            </a:pPr>
-            <a:r>
-              <a:rPr sz="1150" b="1" i="0">
-                <a:solidFill>
-                  <a:srgbClr val="132C43"/>
-                </a:solidFill>
-                <a:latin typeface="Arial"/>
-              </a:rPr>
-              <a:t>28 Sep</a:t>
-            </a:r>
-          </a:p>
-          <a:p>
-            <a:pPr algn="l">
-              <a:spcAft>
-                <a:spcPts val="0"/>
-              </a:spcAft>
-            </a:pPr>
-            <a:r>
-              <a:rPr sz="1050" b="0" i="0">
-                <a:solidFill>
-                  <a:srgbClr val="48677E"/>
-                </a:solidFill>
-                <a:latin typeface="Arial"/>
-              </a:rPr>
-              <a:t>12 issues; data PRs</a:t>
-            </a:r>
-          </a:p>
-        </p:txBody>
-      </p:sp>
-      <p:sp>
-        <p:nvSpPr>
-          <p:cNvPr id="25" name="Oval 24"/>
-          <p:cNvSpPr/>
-          <p:nvPr/>
-        </p:nvSpPr>
-        <p:spPr>
-          <a:xfrm>
-            <a:off x="5074920" y="4754880"/>
-            <a:ext cx="164592" cy="164592"/>
-          </a:xfrm>
-          <a:prstGeom prst="ellipse">
-            <a:avLst/>
-          </a:prstGeom>
-          <a:solidFill>
-            <a:srgbClr val="132C43"/>
-          </a:solidFill>
-          <a:ln>
-            <a:noFill/>
-          </a:ln>
-          <a:effectLst/>
-        </p:spPr>
-        <p:style>
-          <a:lnRef idx="1">
-            <a:schemeClr val="accent1"/>
-          </a:lnRef>
-          <a:fillRef idx="3">
-            <a:schemeClr val="accent1"/>
-          </a:fillRef>
-          <a:effectRef idx="2">
-            <a:schemeClr val="accent1"/>
-          </a:effectRef>
-          <a:fontRef idx="minor">
-            <a:schemeClr val="lt1"/>
-          </a:fontRef>
-        </p:style>
-        <p:txBody>
-          <a:bodyPr rtlCol="0" anchor="ctr"/>
-          <a:lstStyle/>
-          <a:p/>
-        </p:txBody>
-      </p:sp>
-      <p:sp>
-        <p:nvSpPr>
-          <p:cNvPr id="26" name="TextBox 25"/>
-          <p:cNvSpPr txBox="1"/>
-          <p:nvPr/>
-        </p:nvSpPr>
-        <p:spPr>
-          <a:xfrm>
-            <a:off x="5056632" y="4965192"/>
-            <a:ext cx="2057400" cy="502920"/>
-          </a:xfrm>
-          <a:prstGeom prst="rect">
-            <a:avLst/>
-          </a:prstGeom>
-          <a:noFill/>
-        </p:spPr>
-        <p:txBody>
-          <a:bodyPr wrap="square" anchor="t" lIns="0" rIns="0" tIns="0" bIns="0">
-            <a:spAutoFit/>
-          </a:bodyPr>
-          <a:lstStyle/>
-          <a:p>
-            <a:pPr algn="l">
-              <a:spcAft>
-                <a:spcPts val="0"/>
-              </a:spcAft>
-            </a:pPr>
-            <a:r>
-              <a:rPr sz="1150" b="1" i="0">
-                <a:solidFill>
-                  <a:srgbClr val="132C43"/>
-                </a:solidFill>
-                <a:latin typeface="Arial"/>
-              </a:rPr>
-              <a:t>29 Sep</a:t>
-            </a:r>
-          </a:p>
-          <a:p>
-            <a:pPr algn="l">
-              <a:spcAft>
-                <a:spcPts val="0"/>
-              </a:spcAft>
-            </a:pPr>
-            <a:r>
-              <a:rPr sz="1050" b="0" i="0">
-                <a:solidFill>
-                  <a:srgbClr val="48677E"/>
-                </a:solidFill>
-                <a:latin typeface="Arial"/>
-              </a:rPr>
-              <a:t>Board created</a:t>
-            </a:r>
-          </a:p>
-        </p:txBody>
-      </p:sp>
-      <p:sp>
-        <p:nvSpPr>
-          <p:cNvPr id="27" name="Oval 26"/>
-          <p:cNvSpPr/>
-          <p:nvPr/>
-        </p:nvSpPr>
-        <p:spPr>
-          <a:xfrm>
-            <a:off x="9281159" y="4754880"/>
-            <a:ext cx="164592" cy="164592"/>
-          </a:xfrm>
-          <a:prstGeom prst="ellipse">
-            <a:avLst/>
-          </a:prstGeom>
-          <a:solidFill>
-            <a:srgbClr val="132C43"/>
-          </a:solidFill>
-          <a:ln>
-            <a:noFill/>
-          </a:ln>
-          <a:effectLst/>
-        </p:spPr>
-        <p:style>
-          <a:lnRef idx="1">
-            <a:schemeClr val="accent1"/>
-          </a:lnRef>
-          <a:fillRef idx="3">
-            <a:schemeClr val="accent1"/>
-          </a:fillRef>
-          <a:effectRef idx="2">
-            <a:schemeClr val="accent1"/>
-          </a:effectRef>
-          <a:fontRef idx="minor">
-            <a:schemeClr val="lt1"/>
-          </a:fontRef>
-        </p:style>
-        <p:txBody>
-          <a:bodyPr rtlCol="0" anchor="ctr"/>
-          <a:lstStyle/>
-          <a:p/>
-        </p:txBody>
-      </p:sp>
-      <p:sp>
-        <p:nvSpPr>
-          <p:cNvPr id="28" name="TextBox 27"/>
-          <p:cNvSpPr txBox="1"/>
-          <p:nvPr/>
-        </p:nvSpPr>
-        <p:spPr>
-          <a:xfrm>
-            <a:off x="9262872" y="4965192"/>
-            <a:ext cx="2057400" cy="502920"/>
-          </a:xfrm>
-          <a:prstGeom prst="rect">
-            <a:avLst/>
-          </a:prstGeom>
-          <a:noFill/>
-        </p:spPr>
-        <p:txBody>
-          <a:bodyPr wrap="square" anchor="t" lIns="0" rIns="0" tIns="0" bIns="0">
-            <a:spAutoFit/>
-          </a:bodyPr>
-          <a:lstStyle/>
-          <a:p>
-            <a:pPr algn="l">
-              <a:spcAft>
-                <a:spcPts val="0"/>
-              </a:spcAft>
-            </a:pPr>
-            <a:r>
-              <a:rPr sz="1150" b="1" i="0">
-                <a:solidFill>
-                  <a:srgbClr val="132C43"/>
-                </a:solidFill>
-                <a:latin typeface="Arial"/>
-              </a:rPr>
-              <a:t>30 Sep</a:t>
-            </a:r>
-          </a:p>
-          <a:p>
-            <a:pPr algn="l">
-              <a:spcAft>
-                <a:spcPts val="0"/>
-              </a:spcAft>
-            </a:pPr>
-            <a:r>
-              <a:rPr sz="1050" b="0" i="0">
-                <a:solidFill>
-                  <a:srgbClr val="48677E"/>
-                </a:solidFill>
-                <a:latin typeface="Arial"/>
-              </a:rPr>
-              <a:t>3 issues; EDA; model</a:t>
-            </a:r>
-          </a:p>
-        </p:txBody>
-      </p:sp>
+      </p:pic>
     </p:spTree>
     <p:extLst>
       <p:ext uri="{BB962C8B-B14F-4D97-AF65-F5344CB8AC3E}">
@@ -6437,7 +5008,7 @@
                           </a:solidFill>
                           <a:latin typeface="Arial"/>
                         </a:rPr>
-                        <a:t>scripts/05_feature_engineering.py, 06–12, MODEL_EVALUATION.md</a:t>
+                        <a:t>scripts/05_feature_engineering.py, 06–13, MODEL_EVALUATION.md</a:t>
                       </a:r>
                     </a:p>
                   </a:txBody>
@@ -6509,7 +5080,7 @@
                           </a:solidFill>
                           <a:latin typeface="Arial"/>
                         </a:rPr>
-                        <a:t>scripts/05_feature_engineering.py, 06–12, MODEL_EVALUATION.md</a:t>
+                        <a:t>scripts/05_feature_engineering.py, 06–13, MODEL_EVALUATION.md</a:t>
                       </a:r>
                     </a:p>
                   </a:txBody>
@@ -6532,8 +5103,8 @@
         </p:nvSpPr>
         <p:spPr>
           <a:xfrm>
-            <a:off x="722376" y="4343400"/>
-            <a:ext cx="3456432" cy="1645920"/>
+            <a:off x="722376" y="4315968"/>
+            <a:ext cx="3840480" cy="640080"/>
           </a:xfrm>
           <a:prstGeom prst="roundRect">
             <a:avLst>
@@ -6578,8 +5149,8 @@
         </p:nvSpPr>
         <p:spPr>
           <a:xfrm>
-            <a:off x="859536" y="4416552"/>
-            <a:ext cx="3182112" cy="1508760"/>
+            <a:off x="859536" y="4389120"/>
+            <a:ext cx="3566160" cy="1508760"/>
           </a:xfrm>
           <a:prstGeom prst="rect">
             <a:avLst/>
@@ -6620,7 +5191,7 @@
                 </a:solidFill>
                 <a:latin typeface="Arial"/>
               </a:rPr>
-              <a:t>Re-run the text-mining write-up, time-series forecast and dashboard on the new 1.14M-review dataset.</a:t>
+              <a:t>None</a:t>
             </a:r>
           </a:p>
         </p:txBody>
@@ -6633,8 +5204,8 @@
         </p:nvSpPr>
         <p:spPr>
           <a:xfrm>
-            <a:off x="4352544" y="4343400"/>
-            <a:ext cx="3456432" cy="1645920"/>
+            <a:off x="722376" y="5074920"/>
+            <a:ext cx="3840480" cy="1207008"/>
           </a:xfrm>
           <a:prstGeom prst="roundRect">
             <a:avLst>
@@ -6679,8 +5250,8 @@
         </p:nvSpPr>
         <p:spPr>
           <a:xfrm>
-            <a:off x="4489704" y="4416552"/>
-            <a:ext cx="3182112" cy="1508760"/>
+            <a:off x="859536" y="5148072"/>
+            <a:ext cx="3566160" cy="1508760"/>
           </a:xfrm>
           <a:prstGeom prst="rect">
             <a:avLst/>
@@ -6721,7 +5292,7 @@
                 </a:solidFill>
                 <a:latin typeface="Arial"/>
               </a:rPr>
-              <a:t>Method 1: text mining. Method 2: time-series forecasting. Interactive dashboard and combined recommendations. Due before Review 2.</a:t>
+              <a:t>Method 1: text mining. Method 2: time-series forecasting. Interactive dashboard and combined recommendations.</a:t>
             </a:r>
           </a:p>
         </p:txBody>
@@ -6734,8 +5305,8 @@
         </p:nvSpPr>
         <p:spPr>
           <a:xfrm>
-            <a:off x="7982712" y="4343400"/>
-            <a:ext cx="3456432" cy="1645920"/>
+            <a:off x="4745736" y="4315968"/>
+            <a:ext cx="6181344" cy="1965960"/>
           </a:xfrm>
           <a:prstGeom prst="roundRect">
             <a:avLst>
@@ -6780,8 +5351,8 @@
         </p:nvSpPr>
         <p:spPr>
           <a:xfrm>
-            <a:off x="8119872" y="4416552"/>
-            <a:ext cx="3182112" cy="1508760"/>
+            <a:off x="4882896" y="4389120"/>
+            <a:ext cx="5907024" cy="1508760"/>
           </a:xfrm>
           <a:prstGeom prst="rect">
             <a:avLst/>
@@ -6812,65 +5383,166 @@
           <a:p>
             <a:pPr algn="l">
               <a:spcAft>
-                <a:spcPts val="400"/>
+                <a:spcPts val="0"/>
               </a:spcAft>
             </a:pPr>
             <a:r>
-              <a:rPr sz="1150" b="0" i="0">
+              <a:rPr sz="1000" b="1" i="0">
                 <a:solidFill>
                   <a:srgbClr val="263C50"/>
                 </a:solidFill>
                 <a:latin typeface="Arial"/>
               </a:rPr>
-              <a:t>Notebook: notebooks/Review_1_Analysis.ipynb</a:t>
+              <a:t>Notebook</a:t>
             </a:r>
           </a:p>
           <a:p>
             <a:pPr algn="l">
               <a:spcAft>
-                <a:spcPts val="400"/>
+                <a:spcPts val="200"/>
               </a:spcAft>
             </a:pPr>
             <a:r>
-              <a:rPr sz="1150" b="0" i="0">
-                <a:solidFill>
-                  <a:srgbClr val="263C50"/>
-                </a:solidFill>
-                <a:latin typeface="Arial"/>
-              </a:rPr>
-              <a:t>Data documentation: DATA_SOURCES.md</a:t>
+              <a:rPr sz="900" b="0" i="0">
+                <a:solidFill>
+                  <a:srgbClr val="1F5A8C"/>
+                </a:solidFill>
+                <a:latin typeface="Arial"/>
+                <a:hlinkClick r:id="rId3"/>
+              </a:rPr>
+              <a:t>github.com/Adithya-Monish-Kumar-K/ba-capstone-app-reviews/blob/master/notebooks/Review_1_Analysis.ipynb</a:t>
             </a:r>
           </a:p>
           <a:p>
             <a:pPr algn="l">
               <a:spcAft>
-                <a:spcPts val="400"/>
+                <a:spcPts val="0"/>
               </a:spcAft>
             </a:pPr>
             <a:r>
-              <a:rPr sz="1150" b="0" i="0">
+              <a:rPr sz="1000" b="1" i="0">
                 <a:solidFill>
                   <a:srgbClr val="263C50"/>
                 </a:solidFill>
                 <a:latin typeface="Arial"/>
               </a:rPr>
-              <a:t>Board: GitHub Projects #4 (link on slide 10)</a:t>
+              <a:t>Dataset</a:t>
             </a:r>
           </a:p>
           <a:p>
             <a:pPr algn="l">
               <a:spcAft>
-                <a:spcPts val="400"/>
+                <a:spcPts val="200"/>
               </a:spcAft>
             </a:pPr>
             <a:r>
-              <a:rPr sz="1150" b="0" i="0">
+              <a:rPr sz="900" b="0" i="0">
+                <a:solidFill>
+                  <a:srgbClr val="1F5A8C"/>
+                </a:solidFill>
+                <a:latin typeface="Arial"/>
+                <a:hlinkClick r:id="rId4"/>
+              </a:rPr>
+              <a:t>github.com/Adithya-Monish-Kumar-K/ba-capstone-app-reviews/tree/master/data</a:t>
+            </a:r>
+          </a:p>
+          <a:p>
+            <a:pPr algn="l">
+              <a:spcAft>
+                <a:spcPts val="0"/>
+              </a:spcAft>
+            </a:pPr>
+            <a:r>
+              <a:rPr sz="1000" b="1" i="0">
                 <a:solidFill>
                   <a:srgbClr val="263C50"/>
                 </a:solidFill>
                 <a:latin typeface="Arial"/>
               </a:rPr>
-              <a:t>Summary: docs/Review_1_Contribution_Summary.md</a:t>
+              <a:t>Data documentation</a:t>
+            </a:r>
+          </a:p>
+          <a:p>
+            <a:pPr algn="l">
+              <a:spcAft>
+                <a:spcPts val="200"/>
+              </a:spcAft>
+            </a:pPr>
+            <a:r>
+              <a:rPr sz="900" b="0" i="0">
+                <a:solidFill>
+                  <a:srgbClr val="1F5A8C"/>
+                </a:solidFill>
+                <a:latin typeface="Arial"/>
+                <a:hlinkClick r:id="rId5"/>
+              </a:rPr>
+              <a:t>github.com/Adithya-Monish-Kumar-K/ba-capstone-app-reviews/blob/master/DATA_SOURCES.md</a:t>
+            </a:r>
+          </a:p>
+          <a:p>
+            <a:pPr algn="l">
+              <a:spcAft>
+                <a:spcPts val="0"/>
+              </a:spcAft>
+            </a:pPr>
+            <a:r>
+              <a:rPr sz="1000" b="1" i="0">
+                <a:solidFill>
+                  <a:srgbClr val="263C50"/>
+                </a:solidFill>
+                <a:latin typeface="Arial"/>
+              </a:rPr>
+              <a:t>Board</a:t>
+            </a:r>
+          </a:p>
+          <a:p>
+            <a:pPr algn="l">
+              <a:spcAft>
+                <a:spcPts val="200"/>
+              </a:spcAft>
+            </a:pPr>
+            <a:r>
+              <a:rPr sz="900" b="0" i="0">
+                <a:solidFill>
+                  <a:srgbClr val="1F5A8C"/>
+                </a:solidFill>
+                <a:latin typeface="Arial"/>
+                <a:hlinkClick r:id="rId6"/>
+              </a:rPr>
+              <a:t>github.com/users/Adithya-Monish-Kumar-K/projects/4</a:t>
+            </a:r>
+          </a:p>
+          <a:p>
+            <a:pPr algn="l">
+              <a:spcAft>
+                <a:spcPts val="0"/>
+              </a:spcAft>
+            </a:pPr>
+            <a:r>
+              <a:rPr sz="1000" b="1" i="0">
+                <a:solidFill>
+                  <a:srgbClr val="263C50"/>
+                </a:solidFill>
+                <a:latin typeface="Arial"/>
+              </a:rPr>
+              <a:t>Summary (README)</a:t>
+            </a:r>
+          </a:p>
+          <a:p>
+            <a:pPr algn="l">
+              <a:spcAft>
+                <a:spcPts val="200"/>
+              </a:spcAft>
+            </a:pPr>
+            <a:r>
+              <a:rPr sz="900" b="0" i="0">
+                <a:solidFill>
+                  <a:srgbClr val="1F5A8C"/>
+                </a:solidFill>
+                <a:latin typeface="Arial"/>
+                <a:hlinkClick r:id="rId7"/>
+              </a:rPr>
+              <a:t>github.com/Adithya-Monish-Kumar-K/ba-capstone-app-reviews/blob/master/README.md</a:t>
             </a:r>
           </a:p>
         </p:txBody>
@@ -11103,7 +9775,7 @@
                 </a:solidFill>
                 <a:latin typeface="Arial"/>
               </a:rPr>
-              <a:t>• The July 2026 shift seen in our first (MOST_RELEVANT) sample does not exist in the full data.</a:t>
+              <a:t>• No mid-year shift: no app's reviews per day rise after July, and median length is unchanged in 10 of 11 apps.</a:t>
             </a:r>
           </a:p>
           <a:p>
@@ -11410,7 +10082,7 @@
                 </a:solidFill>
                 <a:latin typeface="Arial"/>
               </a:rPr>
-              <a:t>Text columns 20,000 → 200 (100× smaller) while keeping 62.7% of the TF-IDF variance. Three sentiment scores are the top three Random Forest features; all four make up 42% of total importance.</a:t>
+              <a:t>Text columns 20,000 → 200 (100× smaller) while keeping 62.7% of the TF-IDF variance. Every group adds: text alone gives PR-AUC 0.85, sentiment alone 0.74–0.80, all 215 features 0.87. Sentiment scores are the top three Random Forest features.</a:t>
             </a:r>
           </a:p>
         </p:txBody>
@@ -12088,7 +10760,7 @@
                 </a:solidFill>
                 <a:latin typeface="Arial"/>
               </a:rPr>
-              <a:t>Both use class_weight = balanced (only 19.5% positive). Logistic Regression: max_iter 1000. Random Forest: 150 trees, 30% bootstrap per tree, at least 100 reviews per leaf (model 9.8 MB). No grid search.</a:t>
+              <a:t>Both use class_weight = balanced (only 19.5% positive). Logistic Regression: max_iter 1000. Random Forest: 150 trees, 30% bootstrap per tree, at least 100 reviews per leaf (model 9.8 MB). Checked on a validation split of the training data: C = 1 is best for Logistic Regression; 25 reviews per leaf adds only 0.004 PR-AUC to the Random Forest at 2.8× the size.</a:t>
             </a:r>
           </a:p>
         </p:txBody>
@@ -13428,7 +12100,7 @@
                 </a:solidFill>
                 <a:latin typeface="Arial"/>
               </a:rPr>
-              <a:t>R², MAE, MSE, RMSE do not apply (classification). Out-of-time test (Apr–Aug → 1–20 Sep): PR-AUC 0.866 (RF), 0.862 (LR). RF PR-AUC by domain: Food &amp; Grocery 0.895, Shopping 0.869, Payments 0.750.</a:t>
+              <a:t>R², MAE, MSE, RMSE do not apply (classification). Out-of-time test (Apr–Aug → 1–20 Sep): PR-AUC 0.866 (RF), 0.862 (LR). RF PR-AUC by domain: Food &amp; Grocery 0.895, Shopping 0.869, Payments 0.750. 95% bootstrap intervals: ±0.003 PR-AUC, ±0.001 accuracy.</a:t>
             </a:r>
           </a:p>
         </p:txBody>
